--- a/docs/viva/AgentShield.pptx
+++ b/docs/viva/AgentShield.pptx
@@ -3263,7 +3263,7 @@
         <p:spPr>
           <a:xfrm>
             <a:off x="1463040" y="1554480"/>
-            <a:ext cx="6217920" cy="3496454"/>
+            <a:ext cx="6217920" cy="3508469"/>
           </a:xfrm>
           <a:prstGeom prst="rect">
             <a:avLst/>
